--- a/public/ppt-beautify/covers/minimal-gray.pptx
+++ b/public/ppt-beautify/covers/minimal-gray.pptx
@@ -857,7 +857,7 @@
     <p:bg>
       <p:bgPr>
         <a:solidFill>
-          <a:srgbClr val="F1F5F9"/>
+          <a:srgbClr val="F8FAFC"/>
         </a:solidFill>
       </p:bgPr>
     </p:bg>
@@ -883,8 +883,8 @@
         </p:nvSpPr>
         <p:spPr>
           <a:xfrm>
-            <a:off x="0" y="0"/>
-            <a:ext cx="109728" cy="5143500"/>
+            <a:off x="502920" y="502920"/>
+            <a:ext cx="1097280" cy="54864"/>
           </a:xfrm>
           <a:prstGeom prst="rect">
             <a:avLst/>
@@ -903,8 +903,8 @@
         </p:nvSpPr>
         <p:spPr>
           <a:xfrm>
-            <a:off x="502920" y="1508760"/>
-            <a:ext cx="8046720" cy="1097280"/>
+            <a:off x="502920" y="1234440"/>
+            <a:ext cx="7772400" cy="1097280"/>
           </a:xfrm>
           <a:prstGeom prst="rect">
             <a:avLst/>
@@ -916,21 +916,21 @@
           <a:bodyPr wrap="square" rtlCol="0" anchor="ctr"/>
           <a:lstStyle/>
           <a:p>
-            <a:pPr indent="0" marL="0">
+            <a:pPr algn="l" indent="0" marL="0">
               <a:buNone/>
             </a:pPr>
             <a:r>
-              <a:rPr lang="en-US" sz="3200" b="1" dirty="0">
+              <a:rPr lang="en-US" sz="3400" b="1" dirty="0">
                 <a:solidFill>
-                  <a:srgbClr val="0F172A"/>
+                  <a:srgbClr val="FFFFFF"/>
                 </a:solidFill>
                 <a:latin typeface="Microsoft YaHei" pitchFamily="34" charset="0"/>
                 <a:ea typeface="Microsoft YaHei" pitchFamily="34" charset="-122"/>
                 <a:cs typeface="Microsoft YaHei" pitchFamily="34" charset="-120"/>
               </a:rPr>
-              <a:t>在此填写主标题</a:t>
+              <a:t>CC_COVER_TITLE</a:t>
             </a:r>
-            <a:endParaRPr lang="en-US" sz="3200" dirty="0"/>
+            <a:endParaRPr lang="en-US" sz="3400" dirty="0"/>
           </a:p>
         </p:txBody>
       </p:sp>
@@ -942,8 +942,8 @@
         </p:nvSpPr>
         <p:spPr>
           <a:xfrm>
-            <a:off x="502920" y="2697480"/>
-            <a:ext cx="8046720" cy="685800"/>
+            <a:off x="502920" y="2423160"/>
+            <a:ext cx="7772400" cy="685800"/>
           </a:xfrm>
           <a:prstGeom prst="rect">
             <a:avLst/>
@@ -955,19 +955,19 @@
           <a:bodyPr wrap="square" rtlCol="0" anchor="ctr"/>
           <a:lstStyle/>
           <a:p>
-            <a:pPr indent="0" marL="0">
+            <a:pPr algn="l" indent="0" marL="0">
               <a:buNone/>
             </a:pPr>
             <a:r>
               <a:rPr lang="en-US" sz="1600" dirty="0">
                 <a:solidFill>
-                  <a:srgbClr val="475569"/>
+                  <a:srgbClr val="F1F5F9"/>
                 </a:solidFill>
                 <a:latin typeface="Microsoft YaHei" pitchFamily="34" charset="0"/>
                 <a:ea typeface="Microsoft YaHei" pitchFamily="34" charset="-122"/>
                 <a:cs typeface="Microsoft YaHei" pitchFamily="34" charset="-120"/>
               </a:rPr>
-              <a:t>在此填写副标题</a:t>
+              <a:t>CC_COVER_SUBTITLE</a:t>
             </a:r>
             <a:endParaRPr lang="en-US" sz="1600" dirty="0"/>
           </a:p>
@@ -1000,13 +1000,13 @@
             <a:r>
               <a:rPr lang="en-US" sz="1200" dirty="0">
                 <a:solidFill>
-                  <a:srgbClr val="64748B"/>
+                  <a:srgbClr val="FFFFFF"/>
                 </a:solidFill>
                 <a:latin typeface="Microsoft YaHei" pitchFamily="34" charset="0"/>
                 <a:ea typeface="Microsoft YaHei" pitchFamily="34" charset="-122"/>
                 <a:cs typeface="Microsoft YaHei" pitchFamily="34" charset="-120"/>
               </a:rPr>
-              <a:t>汇报人</a:t>
+              <a:t>CC_COVER_AUTHOR</a:t>
             </a:r>
             <a:endParaRPr lang="en-US" sz="1200" dirty="0"/>
           </a:p>
@@ -1039,13 +1039,169 @@
             <a:r>
               <a:rPr lang="en-US" sz="1200" dirty="0">
                 <a:solidFill>
-                  <a:srgbClr val="64748B"/>
+                  <a:srgbClr val="FFFFFF"/>
                 </a:solidFill>
                 <a:latin typeface="Microsoft YaHei" pitchFamily="34" charset="0"/>
                 <a:ea typeface="Microsoft YaHei" pitchFamily="34" charset="-122"/>
                 <a:cs typeface="Microsoft YaHei" pitchFamily="34" charset="-120"/>
               </a:rPr>
-              <a:t>2025.01.01</a:t>
+              <a:t>CC_COVER_DATE</a:t>
+            </a:r>
+            <a:endParaRPr lang="en-US" sz="1200" dirty="0"/>
+          </a:p>
+        </p:txBody>
+      </p:sp>
+      <p:sp>
+        <p:nvSpPr>
+          <p:cNvPr id="7" name="Text 5"/>
+          <p:cNvSpPr/>
+          <p:nvPr/>
+        </p:nvSpPr>
+        <p:spPr>
+          <a:xfrm>
+            <a:off x="502920" y="1234440"/>
+            <a:ext cx="7772400" cy="1097280"/>
+          </a:xfrm>
+          <a:prstGeom prst="rect">
+            <a:avLst/>
+          </a:prstGeom>
+          <a:noFill/>
+          <a:ln/>
+        </p:spPr>
+        <p:txBody>
+          <a:bodyPr wrap="square" rtlCol="0" anchor="ctr"/>
+          <a:lstStyle/>
+          <a:p>
+            <a:pPr indent="0" marL="0">
+              <a:buNone/>
+            </a:pPr>
+            <a:r>
+              <a:rPr lang="en-US" sz="3400" b="1" dirty="0">
+                <a:solidFill>
+                  <a:srgbClr val="475569"/>
+                </a:solidFill>
+                <a:latin typeface="Microsoft YaHei" pitchFamily="34" charset="0"/>
+                <a:ea typeface="Microsoft YaHei" pitchFamily="34" charset="-122"/>
+                <a:cs typeface="Microsoft YaHei" pitchFamily="34" charset="-120"/>
+              </a:rPr>
+              <a:t>CC_COVER_TITLE</a:t>
+            </a:r>
+            <a:endParaRPr lang="en-US" sz="3400" dirty="0"/>
+          </a:p>
+        </p:txBody>
+      </p:sp>
+      <p:sp>
+        <p:nvSpPr>
+          <p:cNvPr id="8" name="Text 6"/>
+          <p:cNvSpPr/>
+          <p:nvPr/>
+        </p:nvSpPr>
+        <p:spPr>
+          <a:xfrm>
+            <a:off x="502920" y="2423160"/>
+            <a:ext cx="7772400" cy="685800"/>
+          </a:xfrm>
+          <a:prstGeom prst="rect">
+            <a:avLst/>
+          </a:prstGeom>
+          <a:noFill/>
+          <a:ln/>
+        </p:spPr>
+        <p:txBody>
+          <a:bodyPr wrap="square" rtlCol="0" anchor="ctr"/>
+          <a:lstStyle/>
+          <a:p>
+            <a:pPr indent="0" marL="0">
+              <a:buNone/>
+            </a:pPr>
+            <a:r>
+              <a:rPr lang="en-US" sz="1500" dirty="0">
+                <a:solidFill>
+                  <a:srgbClr val="475569"/>
+                </a:solidFill>
+                <a:latin typeface="Microsoft YaHei" pitchFamily="34" charset="0"/>
+                <a:ea typeface="Microsoft YaHei" pitchFamily="34" charset="-122"/>
+                <a:cs typeface="Microsoft YaHei" pitchFamily="34" charset="-120"/>
+              </a:rPr>
+              <a:t>CC_COVER_SUBTITLE</a:t>
+            </a:r>
+            <a:endParaRPr lang="en-US" sz="1500" dirty="0"/>
+          </a:p>
+        </p:txBody>
+      </p:sp>
+      <p:sp>
+        <p:nvSpPr>
+          <p:cNvPr id="9" name="Text 7"/>
+          <p:cNvSpPr/>
+          <p:nvPr/>
+        </p:nvSpPr>
+        <p:spPr>
+          <a:xfrm>
+            <a:off x="502920" y="4709160"/>
+            <a:ext cx="3657600" cy="320040"/>
+          </a:xfrm>
+          <a:prstGeom prst="rect">
+            <a:avLst/>
+          </a:prstGeom>
+          <a:noFill/>
+          <a:ln/>
+        </p:spPr>
+        <p:txBody>
+          <a:bodyPr wrap="square" rtlCol="0" anchor="ctr"/>
+          <a:lstStyle/>
+          <a:p>
+            <a:pPr indent="0" marL="0">
+              <a:buNone/>
+            </a:pPr>
+            <a:r>
+              <a:rPr lang="en-US" sz="1200" dirty="0">
+                <a:solidFill>
+                  <a:srgbClr val="475569"/>
+                </a:solidFill>
+                <a:latin typeface="Microsoft YaHei" pitchFamily="34" charset="0"/>
+                <a:ea typeface="Microsoft YaHei" pitchFamily="34" charset="-122"/>
+                <a:cs typeface="Microsoft YaHei" pitchFamily="34" charset="-120"/>
+              </a:rPr>
+              <a:t>CC_COVER_AUTHOR</a:t>
+            </a:r>
+            <a:endParaRPr lang="en-US" sz="1200" dirty="0"/>
+          </a:p>
+        </p:txBody>
+      </p:sp>
+      <p:sp>
+        <p:nvSpPr>
+          <p:cNvPr id="10" name="Text 8"/>
+          <p:cNvSpPr/>
+          <p:nvPr/>
+        </p:nvSpPr>
+        <p:spPr>
+          <a:xfrm>
+            <a:off x="5029200" y="4709160"/>
+            <a:ext cx="3611880" cy="320040"/>
+          </a:xfrm>
+          <a:prstGeom prst="rect">
+            <a:avLst/>
+          </a:prstGeom>
+          <a:noFill/>
+          <a:ln/>
+        </p:spPr>
+        <p:txBody>
+          <a:bodyPr wrap="square" rtlCol="0" anchor="ctr"/>
+          <a:lstStyle/>
+          <a:p>
+            <a:pPr algn="r" indent="0" marL="0">
+              <a:buNone/>
+            </a:pPr>
+            <a:r>
+              <a:rPr lang="en-US" sz="1200" dirty="0">
+                <a:solidFill>
+                  <a:srgbClr val="475569"/>
+                </a:solidFill>
+                <a:latin typeface="Microsoft YaHei" pitchFamily="34" charset="0"/>
+                <a:ea typeface="Microsoft YaHei" pitchFamily="34" charset="-122"/>
+                <a:cs typeface="Microsoft YaHei" pitchFamily="34" charset="-120"/>
+              </a:rPr>
+              <a:t>CC_COVER_DATE</a:t>
             </a:r>
             <a:endParaRPr lang="en-US" sz="1200" dirty="0"/>
           </a:p>
